--- a/pitch/Smart_Demand_Signals.pptx
+++ b/pitch/Smart_Demand_Signals.pptx
@@ -7603,7 +7603,7 @@
                 </a:solidFill>
                 <a:latin typeface="Calibri"/>
               </a:rPr>
-              <a:t>4,394</a:t>
+              <a:t>4,303</a:t>
             </a:r>
           </a:p>
         </p:txBody>
@@ -7673,7 +7673,7 @@
                 </a:solidFill>
                 <a:latin typeface="Calibri"/>
               </a:rPr>
-              <a:t>1,093</a:t>
+              <a:t>1,034</a:t>
             </a:r>
           </a:p>
         </p:txBody>
@@ -7743,7 +7743,7 @@
                 </a:solidFill>
                 <a:latin typeface="Calibri"/>
               </a:rPr>
-              <a:t>€11.8M</a:t>
+              <a:t>€11.3M</a:t>
             </a:r>
           </a:p>
         </p:txBody>
@@ -7848,7 +7848,7 @@
                 </a:solidFill>
                 <a:latin typeface="Calibri"/>
               </a:rPr>
-              <a:t>silent 1,494   ·   capture_window 1,030   ·   lost 991   ·   churn_risk 492   ·   opportunity_spike 387</a:t>
+              <a:t>silent 1,465   ·   capture_window 1,002   ·   lost 988   ·   churn_risk 466   ·   opportunity_spike 382</a:t>
             </a:r>
           </a:p>
         </p:txBody>

--- a/pitch/Smart_Demand_Signals.pptx
+++ b/pitch/Smart_Demand_Signals.pptx
@@ -7603,7 +7603,7 @@
                 </a:solidFill>
                 <a:latin typeface="Calibri"/>
               </a:rPr>
-              <a:t>4,303</a:t>
+              <a:t>4,271</a:t>
             </a:r>
           </a:p>
         </p:txBody>
@@ -7673,7 +7673,7 @@
                 </a:solidFill>
                 <a:latin typeface="Calibri"/>
               </a:rPr>
-              <a:t>1,034</a:t>
+              <a:t>1,300</a:t>
             </a:r>
           </a:p>
         </p:txBody>
@@ -7743,7 +7743,7 @@
                 </a:solidFill>
                 <a:latin typeface="Calibri"/>
               </a:rPr>
-              <a:t>€11.3M</a:t>
+              <a:t>€11.6M</a:t>
             </a:r>
           </a:p>
         </p:txBody>
@@ -7848,7 +7848,7 @@
                 </a:solidFill>
                 <a:latin typeface="Calibri"/>
               </a:rPr>
-              <a:t>silent 1,465   ·   capture_window 1,002   ·   lost 988   ·   churn_risk 466   ·   opportunity_spike 382</a:t>
+              <a:t>silent 827   ·   capture_window 1,024   ·   lost 1,565   ·   churn_risk 472   ·   opportunity_spike 383</a:t>
             </a:r>
           </a:p>
         </p:txBody>
